--- a/downloads/slides/Lesson11_Slides.pptx
+++ b/downloads/slides/Lesson11_Slides.pptx
@@ -963,7 +963,7 @@
           <a:p>
             <a:r>
               <a:rPr lang="en-US" dirty="0"/>
-              <a:t>Step 3 · 6:18–6:30 · Listening + "Say it" (L11_listening.mp3, about 1:30). Audio: L11_listening.mp3 (about 1:30). The audio plays once, play again if needed. Audio coming soon: until it is ready, read the script with a volunteer learner.</a:t>
+              <a:t>Step 3 · 6:18–6:30 · Listening + "Say it" (L11_listening.mp3, about 1:05). Audio: L11_listening.mp3 (about 1:05). The audio plays once, play again if needed. No speaker? Read the script with a volunteer learner.</a:t>
             </a:r>
           </a:p>
           <a:p>
